--- a/Planning docs/Slides/lesson-22-1-teacher-slides.pptx
+++ b/Planning docs/Slides/lesson-22-1-teacher-slides.pptx
@@ -517,7 +517,7 @@
           <a:p>
             <a:r>
               <a:rPr lang="en-US" dirty="0"/>
-              <a:t>Lesson 22.1. Reading: Synthesis: Characters.</a:t>
+              <a:t>Lesson 22.1. Reading: Characters.</a:t>
             </a:r>
             <a:endParaRPr lang="en-US" dirty="0"/>
           </a:p>
@@ -2320,7 +2320,7 @@
                 <a:ea typeface="Calibri" pitchFamily="34" charset="-122"/>
                 <a:cs typeface="Calibri" pitchFamily="34" charset="-120"/>
               </a:rPr>
-              <a:t>Lesson 22.1  ·  Synthesis: Characters</a:t>
+              <a:t>Lesson 22.1  ·  Characters</a:t>
             </a:r>
             <a:endParaRPr lang="en-US" sz="2000" dirty="0"/>
           </a:p>
@@ -5010,7 +5010,7 @@
                 <a:ea typeface="Calibri" pitchFamily="34" charset="-122"/>
                 <a:cs typeface="Calibri" pitchFamily="34" charset="-120"/>
               </a:rPr>
-              <a:t>Synthesis: Characters</a:t>
+              <a:t>Characters</a:t>
             </a:r>
             <a:endParaRPr lang="en-US" sz="2600" dirty="0"/>
           </a:p>
@@ -5088,7 +5088,7 @@
                 <a:ea typeface="Calibri" pitchFamily="34" charset="-122"/>
                 <a:cs typeface="Calibri" pitchFamily="34" charset="-120"/>
               </a:rPr>
-              <a:t>•  Good readers can look back at an entire novel and trace how characters grow. Today we think about the whole book and compare Jemmy and Prince Brat side by side.</a:t>
+              <a:t>•  Think about Jemmy at the start (Chapter 1) vs. the end (Chapter 20). What is the most important thing that changed?</a:t>
             </a:r>
             <a:endParaRPr lang="en-US" sz="1500" dirty="0"/>
           </a:p>
@@ -5105,24 +5105,7 @@
                 <a:ea typeface="Calibri" pitchFamily="34" charset="-122"/>
                 <a:cs typeface="Calibri" pitchFamily="34" charset="-120"/>
               </a:rPr>
-              <a:t>•  Look at the letters around the dot in each word. Count: vowel, consonant, consonant, vowel. That's the VCCV pattern .</a:t>
-            </a:r>
-            <a:endParaRPr lang="en-US" sz="1500" dirty="0"/>
-          </a:p>
-          <a:p>
-            <a:pPr indent="0" marL="0">
-              <a:buNone/>
-            </a:pPr>
-            <a:r>
-              <a:rPr lang="en-US" sz="1500" dirty="0">
-                <a:solidFill>
-                  <a:srgbClr val="1E293B"/>
-                </a:solidFill>
-                <a:latin typeface="Calibri" pitchFamily="34" charset="0"/>
-                <a:ea typeface="Calibri" pitchFamily="34" charset="-122"/>
-                <a:cs typeface="Calibri" pitchFamily="34" charset="-120"/>
-              </a:rPr>
-              <a:t>•  Where does the dot fall — before, between, or after the two consonants?</a:t>
+              <a:t>•  Think about Prince Brat: one thing that changed, and one thing that stayed the same.</a:t>
             </a:r>
             <a:endParaRPr lang="en-US" sz="1500" dirty="0"/>
           </a:p>
@@ -6278,7 +6261,7 @@
                 <a:ea typeface="Calibri" pitchFamily="34" charset="-122"/>
                 <a:cs typeface="Calibri" pitchFamily="34" charset="-120"/>
               </a:rPr>
-              <a:t>Synthesis: Characters</a:t>
+              <a:t>Characters</a:t>
             </a:r>
             <a:endParaRPr lang="en-US" sz="2000" dirty="0"/>
           </a:p>
